--- a/presentations/이지위평_TFT_마일스톤_역할_v1.pptx
+++ b/presentations/이지위평_TFT_마일스톤_역할_v1.pptx
@@ -1128,6 +1128,10 @@
           </a:solidFill>
           <a:ln/>
         </p:spPr>
+        <p:txBody>
+          <a:bodyPr/>
+          <a:p/>
+        </p:txBody>
       </p:sp>
       <p:sp>
         <p:nvSpPr>
@@ -1148,6 +1152,10 @@
           </a:solidFill>
           <a:ln/>
         </p:spPr>
+        <p:txBody>
+          <a:bodyPr/>
+          <a:p/>
+        </p:txBody>
       </p:sp>
       <p:sp>
         <p:nvSpPr>
@@ -1182,6 +1190,10 @@
             </a:outerShdw>
           </a:effectLst>
         </p:spPr>
+        <p:txBody>
+          <a:bodyPr/>
+          <a:p/>
+        </p:txBody>
       </p:sp>
       <p:sp>
         <p:nvSpPr>
@@ -1269,6 +1281,10 @@
             <a:prstDash val="solid"/>
           </a:ln>
         </p:spPr>
+        <p:txBody>
+          <a:bodyPr/>
+          <a:p/>
+        </p:txBody>
       </p:sp>
       <p:sp>
         <p:nvSpPr>
@@ -1289,6 +1305,10 @@
           </a:solidFill>
           <a:ln/>
         </p:spPr>
+        <p:txBody>
+          <a:bodyPr/>
+          <a:p/>
+        </p:txBody>
       </p:sp>
       <p:sp>
         <p:nvSpPr>
@@ -1318,6 +1338,10 @@
             </a:outerShdw>
           </a:effectLst>
         </p:spPr>
+        <p:txBody>
+          <a:bodyPr/>
+          <a:p/>
+        </p:txBody>
       </p:sp>
       <p:sp>
         <p:nvSpPr>
@@ -1425,6 +1449,10 @@
             <a:prstDash val="solid"/>
           </a:ln>
         </p:spPr>
+        <p:txBody>
+          <a:bodyPr/>
+          <a:p/>
+        </p:txBody>
       </p:sp>
       <p:sp>
         <p:nvSpPr>
@@ -1445,6 +1473,10 @@
           </a:solidFill>
           <a:ln/>
         </p:spPr>
+        <p:txBody>
+          <a:bodyPr/>
+          <a:p/>
+        </p:txBody>
       </p:sp>
       <p:sp>
         <p:nvSpPr>
@@ -1474,6 +1506,10 @@
             </a:outerShdw>
           </a:effectLst>
         </p:spPr>
+        <p:txBody>
+          <a:bodyPr/>
+          <a:p/>
+        </p:txBody>
       </p:sp>
       <p:sp>
         <p:nvSpPr>
@@ -1581,6 +1617,10 @@
             <a:prstDash val="solid"/>
           </a:ln>
         </p:spPr>
+        <p:txBody>
+          <a:bodyPr/>
+          <a:p/>
+        </p:txBody>
       </p:sp>
       <p:sp>
         <p:nvSpPr>
@@ -1601,6 +1641,10 @@
           </a:solidFill>
           <a:ln/>
         </p:spPr>
+        <p:txBody>
+          <a:bodyPr/>
+          <a:p/>
+        </p:txBody>
       </p:sp>
       <p:sp>
         <p:nvSpPr>
@@ -1635,6 +1679,10 @@
             </a:outerShdw>
           </a:effectLst>
         </p:spPr>
+        <p:txBody>
+          <a:bodyPr/>
+          <a:p/>
+        </p:txBody>
       </p:sp>
       <p:sp>
         <p:nvSpPr>
@@ -1742,6 +1790,10 @@
             <a:prstDash val="solid"/>
           </a:ln>
         </p:spPr>
+        <p:txBody>
+          <a:bodyPr/>
+          <a:p/>
+        </p:txBody>
       </p:sp>
       <p:sp>
         <p:nvSpPr>
@@ -1762,6 +1814,10 @@
           </a:solidFill>
           <a:ln/>
         </p:spPr>
+        <p:txBody>
+          <a:bodyPr/>
+          <a:p/>
+        </p:txBody>
       </p:sp>
       <p:sp>
         <p:nvSpPr>
@@ -1796,6 +1852,10 @@
             </a:outerShdw>
           </a:effectLst>
         </p:spPr>
+        <p:txBody>
+          <a:bodyPr/>
+          <a:p/>
+        </p:txBody>
       </p:sp>
       <p:sp>
         <p:nvSpPr>
@@ -1883,6 +1943,10 @@
             <a:prstDash val="solid"/>
           </a:ln>
         </p:spPr>
+        <p:txBody>
+          <a:bodyPr/>
+          <a:p/>
+        </p:txBody>
       </p:sp>
       <p:sp>
         <p:nvSpPr>
@@ -1903,6 +1967,10 @@
           </a:solidFill>
           <a:ln/>
         </p:spPr>
+        <p:txBody>
+          <a:bodyPr/>
+          <a:p/>
+        </p:txBody>
       </p:sp>
       <p:sp>
         <p:nvSpPr>
@@ -1937,6 +2005,10 @@
             </a:outerShdw>
           </a:effectLst>
         </p:spPr>
+        <p:txBody>
+          <a:bodyPr/>
+          <a:p/>
+        </p:txBody>
       </p:sp>
       <p:sp>
         <p:nvSpPr>
@@ -1974,7 +2046,7 @@
                 <a:ea typeface="NanumGothic" pitchFamily="34" charset="-122"/>
                 <a:cs typeface="NanumGothic" pitchFamily="34" charset="-120"/>
               </a:rPr>
-              <a:t>2026.01.22</a:t>
+              <a:t>2027.01.22</a:t>
             </a:r>
             <a:endParaRPr lang="en-US" sz="1600" dirty="0"/>
           </a:p>
@@ -2044,6 +2116,10 @@
             <a:prstDash val="solid"/>
           </a:ln>
         </p:spPr>
+        <p:txBody>
+          <a:bodyPr/>
+          <a:p/>
+        </p:txBody>
       </p:sp>
       <p:sp>
         <p:nvSpPr>
@@ -2064,6 +2140,10 @@
           </a:solidFill>
           <a:ln/>
         </p:spPr>
+        <p:txBody>
+          <a:bodyPr/>
+          <a:p/>
+        </p:txBody>
       </p:sp>
       <p:sp>
         <p:nvSpPr>
@@ -2098,6 +2178,10 @@
             </a:outerShdw>
           </a:effectLst>
         </p:spPr>
+        <p:txBody>
+          <a:bodyPr/>
+          <a:p/>
+        </p:txBody>
       </p:sp>
       <p:sp>
         <p:nvSpPr>
@@ -2135,7 +2219,7 @@
                 <a:ea typeface="NanumGothic" pitchFamily="34" charset="-122"/>
                 <a:cs typeface="NanumGothic" pitchFamily="34" charset="-120"/>
               </a:rPr>
-              <a:t>2026.02</a:t>
+              <a:t>2027.02</a:t>
             </a:r>
             <a:endParaRPr lang="en-US" sz="1600" dirty="0"/>
           </a:p>
@@ -2205,6 +2289,10 @@
             <a:prstDash val="solid"/>
           </a:ln>
         </p:spPr>
+        <p:txBody>
+          <a:bodyPr/>
+          <a:p/>
+        </p:txBody>
       </p:sp>
       <p:sp>
         <p:nvSpPr>
@@ -2278,7 +2366,7 @@
                 <a:ea typeface="NanumGothic" pitchFamily="34" charset="-122"/>
                 <a:cs typeface="NanumGothic" pitchFamily="34" charset="-120"/>
               </a:rPr>
-              <a:t>※ 2026년 일정(확대 심사·업무 인입)은 제안이며 미확정입니다.    ※ 2025.11 오픈 다음 연초 기준 — 연도(2026) 확인 필요 시 조정.</a:t>
+              <a:t/>
             </a:r>
             <a:endParaRPr lang="en-US" sz="1200" dirty="0"/>
           </a:p>
@@ -2547,6 +2635,10 @@
             </a:outerShdw>
           </a:effectLst>
         </p:spPr>
+        <p:txBody>
+          <a:bodyPr/>
+          <a:p/>
+        </p:txBody>
       </p:sp>
       <p:sp>
         <p:nvSpPr>
@@ -2569,6 +2661,10 @@
           </a:solidFill>
           <a:ln/>
         </p:spPr>
+        <p:txBody>
+          <a:bodyPr/>
+          <a:p/>
+        </p:txBody>
       </p:sp>
       <p:sp>
         <p:nvSpPr>
@@ -2589,6 +2685,10 @@
           </a:solidFill>
           <a:ln/>
         </p:spPr>
+        <p:txBody>
+          <a:bodyPr/>
+          <a:p/>
+        </p:txBody>
       </p:sp>
       <p:sp>
         <p:nvSpPr>
@@ -2740,6 +2840,10 @@
             </a:outerShdw>
           </a:effectLst>
         </p:spPr>
+        <p:txBody>
+          <a:bodyPr/>
+          <a:p/>
+        </p:txBody>
       </p:sp>
       <p:sp>
         <p:nvSpPr>
@@ -2762,6 +2866,10 @@
           </a:solidFill>
           <a:ln/>
         </p:spPr>
+        <p:txBody>
+          <a:bodyPr/>
+          <a:p/>
+        </p:txBody>
       </p:sp>
       <p:sp>
         <p:nvSpPr>
@@ -2782,6 +2890,10 @@
           </a:solidFill>
           <a:ln/>
         </p:spPr>
+        <p:txBody>
+          <a:bodyPr/>
+          <a:p/>
+        </p:txBody>
       </p:sp>
       <p:sp>
         <p:nvSpPr>
@@ -2954,6 +3066,10 @@
             </a:outerShdw>
           </a:effectLst>
         </p:spPr>
+        <p:txBody>
+          <a:bodyPr/>
+          <a:p/>
+        </p:txBody>
       </p:sp>
       <p:sp>
         <p:nvSpPr>
@@ -2976,6 +3092,10 @@
           </a:solidFill>
           <a:ln/>
         </p:spPr>
+        <p:txBody>
+          <a:bodyPr/>
+          <a:p/>
+        </p:txBody>
       </p:sp>
       <p:sp>
         <p:nvSpPr>
@@ -2996,6 +3116,10 @@
           </a:solidFill>
           <a:ln/>
         </p:spPr>
+        <p:txBody>
+          <a:bodyPr/>
+          <a:p/>
+        </p:txBody>
       </p:sp>
       <p:sp>
         <p:nvSpPr>
@@ -3168,6 +3292,10 @@
             </a:outerShdw>
           </a:effectLst>
         </p:spPr>
+        <p:txBody>
+          <a:bodyPr/>
+          <a:p/>
+        </p:txBody>
       </p:sp>
       <p:sp>
         <p:nvSpPr>
@@ -3190,6 +3318,10 @@
           </a:solidFill>
           <a:ln/>
         </p:spPr>
+        <p:txBody>
+          <a:bodyPr/>
+          <a:p/>
+        </p:txBody>
       </p:sp>
       <p:sp>
         <p:nvSpPr>
@@ -3210,6 +3342,10 @@
           </a:solidFill>
           <a:ln/>
         </p:spPr>
+        <p:txBody>
+          <a:bodyPr/>
+          <a:p/>
+        </p:txBody>
       </p:sp>
       <p:sp>
         <p:nvSpPr>
@@ -3417,6 +3553,10 @@
             </a:outerShdw>
           </a:effectLst>
         </p:spPr>
+        <p:txBody>
+          <a:bodyPr/>
+          <a:p/>
+        </p:txBody>
       </p:sp>
       <p:sp>
         <p:nvSpPr>
@@ -3536,6 +3676,10 @@
             </a:outerShdw>
           </a:effectLst>
         </p:spPr>
+        <p:txBody>
+          <a:bodyPr/>
+          <a:p/>
+        </p:txBody>
       </p:sp>
       <p:sp>
         <p:nvSpPr>
@@ -3655,6 +3799,10 @@
             </a:outerShdw>
           </a:effectLst>
         </p:spPr>
+        <p:txBody>
+          <a:bodyPr/>
+          <a:p/>
+        </p:txBody>
       </p:sp>
       <p:sp>
         <p:nvSpPr>
